--- a/output_pptx/How_Great_Thou_Art.pptx
+++ b/output_pptx/How_Great_Thou_Art.pptx
@@ -3118,8 +3118,8 @@
         </p:nvSpPr>
         <p:spPr>
           <a:xfrm>
-            <a:off x="594360" y="2258568"/>
-            <a:ext cx="11002975" cy="685800"/>
+            <a:off x="640080" y="2052828"/>
+            <a:ext cx="10911535" cy="731520"/>
           </a:xfrm>
           <a:prstGeom prst="rect">
             <a:avLst/>
@@ -3134,7 +3134,7 @@
           <a:p>
             <a:pPr algn="ctr"/>
             <a:r>
-              <a:rPr sz="3610" b="1" i="0">
+              <a:rPr sz="3900" b="1" i="0">
                 <a:solidFill>
                   <a:srgbClr val="FFFFFF"/>
                 </a:solidFill>
@@ -3153,8 +3153,8 @@
         </p:nvSpPr>
         <p:spPr>
           <a:xfrm>
-            <a:off x="594360" y="2980944"/>
-            <a:ext cx="11002975" cy="347472"/>
+            <a:off x="640080" y="2985516"/>
+            <a:ext cx="10911535" cy="731520"/>
           </a:xfrm>
           <a:prstGeom prst="rect">
             <a:avLst/>
@@ -3169,83 +3169,13 @@
           <a:p>
             <a:pPr algn="ctr"/>
             <a:r>
-              <a:rPr sz="2200" b="0" i="1">
-                <a:solidFill>
-                  <a:srgbClr val="8C8C8C"/>
-                </a:solidFill>
-                <a:latin typeface="Arial"/>
-              </a:rPr>
-              <a:t/>
-            </a:r>
-          </a:p>
-        </p:txBody>
-      </p:sp>
-      <p:sp>
-        <p:nvSpPr>
-          <p:cNvPr id="4" name="TextBox 3"/>
-          <p:cNvSpPr txBox="1"/>
-          <p:nvPr/>
-        </p:nvSpPr>
-        <p:spPr>
-          <a:xfrm>
-            <a:off x="594360" y="3529584"/>
-            <a:ext cx="11002975" cy="685800"/>
-          </a:xfrm>
-          <a:prstGeom prst="rect">
-            <a:avLst/>
-          </a:prstGeom>
-          <a:noFill/>
-        </p:spPr>
-        <p:txBody>
-          <a:bodyPr wrap="square">
-            <a:spAutoFit/>
-          </a:bodyPr>
-          <a:lstStyle/>
-          <a:p>
-            <a:pPr algn="ctr"/>
-            <a:r>
-              <a:rPr sz="3805" b="1" i="0">
+              <a:rPr sz="4100" b="1" i="0">
                 <a:solidFill>
                   <a:srgbClr val="FFFFFF"/>
                 </a:solidFill>
                 <a:latin typeface="Arial"/>
               </a:rPr>
               <a:t>Fico a pensar nas obras de Tuas mãos;</a:t>
-            </a:r>
-          </a:p>
-        </p:txBody>
-      </p:sp>
-      <p:sp>
-        <p:nvSpPr>
-          <p:cNvPr id="5" name="TextBox 4"/>
-          <p:cNvSpPr txBox="1"/>
-          <p:nvPr/>
-        </p:nvSpPr>
-        <p:spPr>
-          <a:xfrm>
-            <a:off x="594360" y="4251960"/>
-            <a:ext cx="11002975" cy="347472"/>
-          </a:xfrm>
-          <a:prstGeom prst="rect">
-            <a:avLst/>
-          </a:prstGeom>
-          <a:noFill/>
-        </p:spPr>
-        <p:txBody>
-          <a:bodyPr wrap="square">
-            <a:spAutoFit/>
-          </a:bodyPr>
-          <a:lstStyle/>
-          <a:p>
-            <a:pPr algn="ctr"/>
-            <a:r>
-              <a:rPr sz="2200" b="0" i="1">
-                <a:solidFill>
-                  <a:srgbClr val="8C8C8C"/>
-                </a:solidFill>
-                <a:latin typeface="Arial"/>
-              </a:rPr>
-              <a:t/>
             </a:r>
           </a:p>
         </p:txBody>
@@ -3284,8 +3214,8 @@
         </p:nvSpPr>
         <p:spPr>
           <a:xfrm>
-            <a:off x="594360" y="2258568"/>
-            <a:ext cx="11002975" cy="685800"/>
+            <a:off x="640080" y="2052828"/>
+            <a:ext cx="10911535" cy="731520"/>
           </a:xfrm>
           <a:prstGeom prst="rect">
             <a:avLst/>
@@ -3300,7 +3230,7 @@
           <a:p>
             <a:pPr algn="ctr"/>
             <a:r>
-              <a:rPr sz="4266" b="1" i="0">
+              <a:rPr sz="4600" b="1" i="0">
                 <a:solidFill>
                   <a:srgbClr val="FFFFFF"/>
                 </a:solidFill>
@@ -3319,8 +3249,8 @@
         </p:nvSpPr>
         <p:spPr>
           <a:xfrm>
-            <a:off x="594360" y="2980944"/>
-            <a:ext cx="11002975" cy="347472"/>
+            <a:off x="640080" y="2985516"/>
+            <a:ext cx="10911535" cy="731520"/>
           </a:xfrm>
           <a:prstGeom prst="rect">
             <a:avLst/>
@@ -3335,83 +3265,13 @@
           <a:p>
             <a:pPr algn="ctr"/>
             <a:r>
-              <a:rPr sz="2200" b="0" i="1">
-                <a:solidFill>
-                  <a:srgbClr val="8C8C8C"/>
-                </a:solidFill>
-                <a:latin typeface="Arial"/>
-              </a:rPr>
-              <a:t/>
-            </a:r>
-          </a:p>
-        </p:txBody>
-      </p:sp>
-      <p:sp>
-        <p:nvSpPr>
-          <p:cNvPr id="4" name="TextBox 3"/>
-          <p:cNvSpPr txBox="1"/>
-          <p:nvPr/>
-        </p:nvSpPr>
-        <p:spPr>
-          <a:xfrm>
-            <a:off x="594360" y="3529584"/>
-            <a:ext cx="11002975" cy="685800"/>
-          </a:xfrm>
-          <a:prstGeom prst="rect">
-            <a:avLst/>
-          </a:prstGeom>
-          <a:noFill/>
-        </p:spPr>
-        <p:txBody>
-          <a:bodyPr wrap="square">
-            <a:spAutoFit/>
-          </a:bodyPr>
-          <a:lstStyle/>
-          <a:p>
-            <a:pPr algn="ctr"/>
-            <a:r>
-              <a:rPr sz="3911" b="1" i="0">
+              <a:rPr sz="4200" b="1" i="0">
                 <a:solidFill>
                   <a:srgbClr val="FFFFFF"/>
                 </a:solidFill>
                 <a:latin typeface="Arial"/>
               </a:rPr>
               <a:t>Olhando os montes, vales e campinas,</a:t>
-            </a:r>
-          </a:p>
-        </p:txBody>
-      </p:sp>
-      <p:sp>
-        <p:nvSpPr>
-          <p:cNvPr id="5" name="TextBox 4"/>
-          <p:cNvSpPr txBox="1"/>
-          <p:nvPr/>
-        </p:nvSpPr>
-        <p:spPr>
-          <a:xfrm>
-            <a:off x="594360" y="4251960"/>
-            <a:ext cx="11002975" cy="347472"/>
-          </a:xfrm>
-          <a:prstGeom prst="rect">
-            <a:avLst/>
-          </a:prstGeom>
-          <a:noFill/>
-        </p:spPr>
-        <p:txBody>
-          <a:bodyPr wrap="square">
-            <a:spAutoFit/>
-          </a:bodyPr>
-          <a:lstStyle/>
-          <a:p>
-            <a:pPr algn="ctr"/>
-            <a:r>
-              <a:rPr sz="2200" b="0" i="1">
-                <a:solidFill>
-                  <a:srgbClr val="8C8C8C"/>
-                </a:solidFill>
-                <a:latin typeface="Arial"/>
-              </a:rPr>
-              <a:t/>
             </a:r>
           </a:p>
         </p:txBody>
@@ -3450,8 +3310,8 @@
         </p:nvSpPr>
         <p:spPr>
           <a:xfrm>
-            <a:off x="594360" y="2258568"/>
-            <a:ext cx="11002975" cy="685800"/>
+            <a:off x="640080" y="2052828"/>
+            <a:ext cx="10911535" cy="731520"/>
           </a:xfrm>
           <a:prstGeom prst="rect">
             <a:avLst/>
@@ -3466,7 +3326,7 @@
           <a:p>
             <a:pPr algn="ctr"/>
             <a:r>
-              <a:rPr sz="4266" b="1" i="0">
+              <a:rPr sz="4600" b="1" i="0">
                 <a:solidFill>
                   <a:srgbClr val="FFFFFF"/>
                 </a:solidFill>
@@ -3485,8 +3345,8 @@
         </p:nvSpPr>
         <p:spPr>
           <a:xfrm>
-            <a:off x="594360" y="2980944"/>
-            <a:ext cx="11002975" cy="347472"/>
+            <a:off x="640080" y="2985516"/>
+            <a:ext cx="10911535" cy="731520"/>
           </a:xfrm>
           <a:prstGeom prst="rect">
             <a:avLst/>
@@ -3501,83 +3361,13 @@
           <a:p>
             <a:pPr algn="ctr"/>
             <a:r>
-              <a:rPr sz="2200" b="0" i="1">
-                <a:solidFill>
-                  <a:srgbClr val="8C8C8C"/>
-                </a:solidFill>
-                <a:latin typeface="Arial"/>
-              </a:rPr>
-              <a:t/>
-            </a:r>
-          </a:p>
-        </p:txBody>
-      </p:sp>
-      <p:sp>
-        <p:nvSpPr>
-          <p:cNvPr id="4" name="TextBox 3"/>
-          <p:cNvSpPr txBox="1"/>
-          <p:nvPr/>
-        </p:nvSpPr>
-        <p:spPr>
-          <a:xfrm>
-            <a:off x="594360" y="3529584"/>
-            <a:ext cx="11002975" cy="685800"/>
-          </a:xfrm>
-          <a:prstGeom prst="rect">
-            <a:avLst/>
-          </a:prstGeom>
-          <a:noFill/>
-        </p:spPr>
-        <p:txBody>
-          <a:bodyPr wrap="square">
-            <a:spAutoFit/>
-          </a:bodyPr>
-          <a:lstStyle/>
-          <a:p>
-            <a:pPr algn="ctr"/>
-            <a:r>
-              <a:rPr sz="4141" b="1" i="0">
+              <a:rPr sz="4500" b="1" i="0">
                 <a:solidFill>
                   <a:srgbClr val="FFFFFF"/>
                 </a:solidFill>
                 <a:latin typeface="Arial"/>
               </a:rPr>
               <a:t>Então minh'alma canta a Ti Senhor:</a:t>
-            </a:r>
-          </a:p>
-        </p:txBody>
-      </p:sp>
-      <p:sp>
-        <p:nvSpPr>
-          <p:cNvPr id="5" name="TextBox 4"/>
-          <p:cNvSpPr txBox="1"/>
-          <p:nvPr/>
-        </p:nvSpPr>
-        <p:spPr>
-          <a:xfrm>
-            <a:off x="594360" y="4251960"/>
-            <a:ext cx="11002975" cy="347472"/>
-          </a:xfrm>
-          <a:prstGeom prst="rect">
-            <a:avLst/>
-          </a:prstGeom>
-          <a:noFill/>
-        </p:spPr>
-        <p:txBody>
-          <a:bodyPr wrap="square">
-            <a:spAutoFit/>
-          </a:bodyPr>
-          <a:lstStyle/>
-          <a:p>
-            <a:pPr algn="ctr"/>
-            <a:r>
-              <a:rPr sz="2200" b="0" i="1">
-                <a:solidFill>
-                  <a:srgbClr val="8C8C8C"/>
-                </a:solidFill>
-                <a:latin typeface="Arial"/>
-              </a:rPr>
-              <a:t/>
             </a:r>
           </a:p>
         </p:txBody>
@@ -3616,8 +3406,8 @@
         </p:nvSpPr>
         <p:spPr>
           <a:xfrm>
-            <a:off x="594360" y="2258568"/>
-            <a:ext cx="11002975" cy="685800"/>
+            <a:off x="640080" y="2052828"/>
+            <a:ext cx="10911535" cy="731520"/>
           </a:xfrm>
           <a:prstGeom prst="rect">
             <a:avLst/>
@@ -3632,7 +3422,7 @@
           <a:p>
             <a:pPr algn="ctr"/>
             <a:r>
-              <a:rPr sz="3805" b="1" i="0">
+              <a:rPr sz="4100" b="1" i="0">
                 <a:solidFill>
                   <a:srgbClr val="FFFFFF"/>
                 </a:solidFill>
@@ -3651,8 +3441,8 @@
         </p:nvSpPr>
         <p:spPr>
           <a:xfrm>
-            <a:off x="594360" y="2980944"/>
-            <a:ext cx="11002975" cy="347472"/>
+            <a:off x="640080" y="2985516"/>
+            <a:ext cx="10911535" cy="731520"/>
           </a:xfrm>
           <a:prstGeom prst="rect">
             <a:avLst/>
@@ -3667,83 +3457,13 @@
           <a:p>
             <a:pPr algn="ctr"/>
             <a:r>
-              <a:rPr sz="2200" b="0" i="1">
-                <a:solidFill>
-                  <a:srgbClr val="8C8C8C"/>
-                </a:solidFill>
-                <a:latin typeface="Arial"/>
-              </a:rPr>
-              <a:t/>
-            </a:r>
-          </a:p>
-        </p:txBody>
-      </p:sp>
-      <p:sp>
-        <p:nvSpPr>
-          <p:cNvPr id="4" name="TextBox 3"/>
-          <p:cNvSpPr txBox="1"/>
-          <p:nvPr/>
-        </p:nvSpPr>
-        <p:spPr>
-          <a:xfrm>
-            <a:off x="594360" y="3529584"/>
-            <a:ext cx="11002975" cy="685800"/>
-          </a:xfrm>
-          <a:prstGeom prst="rect">
-            <a:avLst/>
-          </a:prstGeom>
-          <a:noFill/>
-        </p:spPr>
-        <p:txBody>
-          <a:bodyPr wrap="square">
-            <a:spAutoFit/>
-          </a:bodyPr>
-          <a:lstStyle/>
-          <a:p>
-            <a:pPr algn="ctr"/>
-            <a:r>
-              <a:rPr sz="4141" b="1" i="0">
+              <a:rPr sz="4500" b="1" i="0">
                 <a:solidFill>
                   <a:srgbClr val="FFFFFF"/>
                 </a:solidFill>
                 <a:latin typeface="Arial"/>
               </a:rPr>
               <a:t>Então minh'alma canta a Ti Senhor:</a:t>
-            </a:r>
-          </a:p>
-        </p:txBody>
-      </p:sp>
-      <p:sp>
-        <p:nvSpPr>
-          <p:cNvPr id="5" name="TextBox 4"/>
-          <p:cNvSpPr txBox="1"/>
-          <p:nvPr/>
-        </p:nvSpPr>
-        <p:spPr>
-          <a:xfrm>
-            <a:off x="594360" y="4251960"/>
-            <a:ext cx="11002975" cy="347472"/>
-          </a:xfrm>
-          <a:prstGeom prst="rect">
-            <a:avLst/>
-          </a:prstGeom>
-          <a:noFill/>
-        </p:spPr>
-        <p:txBody>
-          <a:bodyPr wrap="square">
-            <a:spAutoFit/>
-          </a:bodyPr>
-          <a:lstStyle/>
-          <a:p>
-            <a:pPr algn="ctr"/>
-            <a:r>
-              <a:rPr sz="2200" b="0" i="1">
-                <a:solidFill>
-                  <a:srgbClr val="8C8C8C"/>
-                </a:solidFill>
-                <a:latin typeface="Arial"/>
-              </a:rPr>
-              <a:t/>
             </a:r>
           </a:p>
         </p:txBody>
@@ -3782,8 +3502,8 @@
         </p:nvSpPr>
         <p:spPr>
           <a:xfrm>
-            <a:off x="594360" y="2894076"/>
-            <a:ext cx="11002975" cy="685800"/>
+            <a:off x="640080" y="2702052"/>
+            <a:ext cx="10911535" cy="731520"/>
           </a:xfrm>
           <a:prstGeom prst="rect">
             <a:avLst/>
@@ -3798,48 +3518,13 @@
           <a:p>
             <a:pPr algn="ctr"/>
             <a:r>
-              <a:rPr sz="3805" b="1" i="0">
+              <a:rPr sz="4100" b="1" i="0">
                 <a:solidFill>
                   <a:srgbClr val="FFFFFF"/>
                 </a:solidFill>
                 <a:latin typeface="Arial"/>
               </a:rPr>
               <a:t>Quão grande és Tu, quão grande és Tu.</a:t>
-            </a:r>
-          </a:p>
-        </p:txBody>
-      </p:sp>
-      <p:sp>
-        <p:nvSpPr>
-          <p:cNvPr id="3" name="TextBox 2"/>
-          <p:cNvSpPr txBox="1"/>
-          <p:nvPr/>
-        </p:nvSpPr>
-        <p:spPr>
-          <a:xfrm>
-            <a:off x="594360" y="3616452"/>
-            <a:ext cx="11002975" cy="347472"/>
-          </a:xfrm>
-          <a:prstGeom prst="rect">
-            <a:avLst/>
-          </a:prstGeom>
-          <a:noFill/>
-        </p:spPr>
-        <p:txBody>
-          <a:bodyPr wrap="square">
-            <a:spAutoFit/>
-          </a:bodyPr>
-          <a:lstStyle/>
-          <a:p>
-            <a:pPr algn="ctr"/>
-            <a:r>
-              <a:rPr sz="2200" b="0" i="1">
-                <a:solidFill>
-                  <a:srgbClr val="8C8C8C"/>
-                </a:solidFill>
-                <a:latin typeface="Arial"/>
-              </a:rPr>
-              <a:t/>
             </a:r>
           </a:p>
         </p:txBody>
@@ -3878,8 +3563,8 @@
         </p:nvSpPr>
         <p:spPr>
           <a:xfrm>
-            <a:off x="594360" y="2258568"/>
-            <a:ext cx="11002975" cy="685800"/>
+            <a:off x="640080" y="2052828"/>
+            <a:ext cx="10911535" cy="731520"/>
           </a:xfrm>
           <a:prstGeom prst="rect">
             <a:avLst/>
@@ -3894,7 +3579,7 @@
           <a:p>
             <a:pPr algn="ctr"/>
             <a:r>
-              <a:rPr sz="3434" b="1" i="0">
+              <a:rPr sz="3700" b="1" i="0">
                 <a:solidFill>
                   <a:srgbClr val="FFFFFF"/>
                 </a:solidFill>
@@ -3913,8 +3598,8 @@
         </p:nvSpPr>
         <p:spPr>
           <a:xfrm>
-            <a:off x="594360" y="2980944"/>
-            <a:ext cx="11002975" cy="347472"/>
+            <a:off x="640080" y="2985516"/>
+            <a:ext cx="10911535" cy="731520"/>
           </a:xfrm>
           <a:prstGeom prst="rect">
             <a:avLst/>
@@ -3929,83 +3614,13 @@
           <a:p>
             <a:pPr algn="ctr"/>
             <a:r>
-              <a:rPr sz="2200" b="0" i="1">
-                <a:solidFill>
-                  <a:srgbClr val="8C8C8C"/>
-                </a:solidFill>
-                <a:latin typeface="Arial"/>
-              </a:rPr>
-              <a:t/>
-            </a:r>
-          </a:p>
-        </p:txBody>
-      </p:sp>
-      <p:sp>
-        <p:nvSpPr>
-          <p:cNvPr id="4" name="TextBox 3"/>
-          <p:cNvSpPr txBox="1"/>
-          <p:nvPr/>
-        </p:nvSpPr>
-        <p:spPr>
-          <a:xfrm>
-            <a:off x="594360" y="3529584"/>
-            <a:ext cx="11002975" cy="685800"/>
-          </a:xfrm>
-          <a:prstGeom prst="rect">
-            <a:avLst/>
-          </a:prstGeom>
-          <a:noFill/>
-        </p:spPr>
-        <p:txBody>
-          <a:bodyPr wrap="square">
-            <a:spAutoFit/>
-          </a:bodyPr>
-          <a:lstStyle/>
-          <a:p>
-            <a:pPr algn="ctr"/>
-            <a:r>
-              <a:rPr sz="3911" b="1" i="0">
+              <a:rPr sz="4200" b="1" i="0">
                 <a:solidFill>
                   <a:srgbClr val="FFFFFF"/>
                 </a:solidFill>
                 <a:latin typeface="Arial"/>
               </a:rPr>
               <a:t>Teu filho dando ao mundo pra salvar;</a:t>
-            </a:r>
-          </a:p>
-        </p:txBody>
-      </p:sp>
-      <p:sp>
-        <p:nvSpPr>
-          <p:cNvPr id="5" name="TextBox 4"/>
-          <p:cNvSpPr txBox="1"/>
-          <p:nvPr/>
-        </p:nvSpPr>
-        <p:spPr>
-          <a:xfrm>
-            <a:off x="594360" y="4251960"/>
-            <a:ext cx="11002975" cy="347472"/>
-          </a:xfrm>
-          <a:prstGeom prst="rect">
-            <a:avLst/>
-          </a:prstGeom>
-          <a:noFill/>
-        </p:spPr>
-        <p:txBody>
-          <a:bodyPr wrap="square">
-            <a:spAutoFit/>
-          </a:bodyPr>
-          <a:lstStyle/>
-          <a:p>
-            <a:pPr algn="ctr"/>
-            <a:r>
-              <a:rPr sz="2200" b="0" i="1">
-                <a:solidFill>
-                  <a:srgbClr val="8C8C8C"/>
-                </a:solidFill>
-                <a:latin typeface="Arial"/>
-              </a:rPr>
-              <a:t/>
             </a:r>
           </a:p>
         </p:txBody>
@@ -4044,8 +3659,8 @@
         </p:nvSpPr>
         <p:spPr>
           <a:xfrm>
-            <a:off x="594360" y="2258568"/>
-            <a:ext cx="11002975" cy="685800"/>
+            <a:off x="640080" y="2052828"/>
+            <a:ext cx="10911535" cy="731520"/>
           </a:xfrm>
           <a:prstGeom prst="rect">
             <a:avLst/>
@@ -4060,7 +3675,7 @@
           <a:p>
             <a:pPr algn="ctr"/>
             <a:r>
-              <a:rPr sz="3805" b="1" i="0">
+              <a:rPr sz="4100" b="1" i="0">
                 <a:solidFill>
                   <a:srgbClr val="FFFFFF"/>
                 </a:solidFill>
@@ -4079,8 +3694,8 @@
         </p:nvSpPr>
         <p:spPr>
           <a:xfrm>
-            <a:off x="594360" y="2980944"/>
-            <a:ext cx="11002975" cy="347472"/>
+            <a:off x="640080" y="2985516"/>
+            <a:ext cx="10911535" cy="731520"/>
           </a:xfrm>
           <a:prstGeom prst="rect">
             <a:avLst/>
@@ -4095,83 +3710,13 @@
           <a:p>
             <a:pPr algn="ctr"/>
             <a:r>
-              <a:rPr sz="2200" b="0" i="1">
-                <a:solidFill>
-                  <a:srgbClr val="8C8C8C"/>
-                </a:solidFill>
-                <a:latin typeface="Arial"/>
-              </a:rPr>
-              <a:t/>
-            </a:r>
-          </a:p>
-        </p:txBody>
-      </p:sp>
-      <p:sp>
-        <p:nvSpPr>
-          <p:cNvPr id="4" name="TextBox 3"/>
-          <p:cNvSpPr txBox="1"/>
-          <p:nvPr/>
-        </p:nvSpPr>
-        <p:spPr>
-          <a:xfrm>
-            <a:off x="594360" y="3529584"/>
-            <a:ext cx="11002975" cy="685800"/>
-          </a:xfrm>
-          <a:prstGeom prst="rect">
-            <a:avLst/>
-          </a:prstGeom>
-          <a:noFill/>
-        </p:spPr>
-        <p:txBody>
-          <a:bodyPr wrap="square">
-            <a:spAutoFit/>
-          </a:bodyPr>
-          <a:lstStyle/>
-          <a:p>
-            <a:pPr algn="ctr"/>
-            <a:r>
-              <a:rPr sz="4400" b="1" i="0">
+              <a:rPr sz="4800" b="1" i="0">
                 <a:solidFill>
                   <a:srgbClr val="FFFFFF"/>
                 </a:solidFill>
                 <a:latin typeface="Arial"/>
               </a:rPr>
               <a:t>Minh'alma pôde assim purificar.</a:t>
-            </a:r>
-          </a:p>
-        </p:txBody>
-      </p:sp>
-      <p:sp>
-        <p:nvSpPr>
-          <p:cNvPr id="5" name="TextBox 4"/>
-          <p:cNvSpPr txBox="1"/>
-          <p:nvPr/>
-        </p:nvSpPr>
-        <p:spPr>
-          <a:xfrm>
-            <a:off x="594360" y="4251960"/>
-            <a:ext cx="11002975" cy="347472"/>
-          </a:xfrm>
-          <a:prstGeom prst="rect">
-            <a:avLst/>
-          </a:prstGeom>
-          <a:noFill/>
-        </p:spPr>
-        <p:txBody>
-          <a:bodyPr wrap="square">
-            <a:spAutoFit/>
-          </a:bodyPr>
-          <a:lstStyle/>
-          <a:p>
-            <a:pPr algn="ctr"/>
-            <a:r>
-              <a:rPr sz="2200" b="0" i="1">
-                <a:solidFill>
-                  <a:srgbClr val="8C8C8C"/>
-                </a:solidFill>
-                <a:latin typeface="Arial"/>
-              </a:rPr>
-              <a:t/>
             </a:r>
           </a:p>
         </p:txBody>
@@ -4210,8 +3755,8 @@
         </p:nvSpPr>
         <p:spPr>
           <a:xfrm>
-            <a:off x="594360" y="2258568"/>
-            <a:ext cx="11002975" cy="685800"/>
+            <a:off x="640080" y="2052828"/>
+            <a:ext cx="10911535" cy="731520"/>
           </a:xfrm>
           <a:prstGeom prst="rect">
             <a:avLst/>
@@ -4226,7 +3771,7 @@
           <a:p>
             <a:pPr algn="ctr"/>
             <a:r>
-              <a:rPr sz="4022" b="1" i="0">
+              <a:rPr sz="4300" b="1" i="0">
                 <a:solidFill>
                   <a:srgbClr val="FFFFFF"/>
                 </a:solidFill>
@@ -4245,8 +3790,8 @@
         </p:nvSpPr>
         <p:spPr>
           <a:xfrm>
-            <a:off x="594360" y="2980944"/>
-            <a:ext cx="11002975" cy="347472"/>
+            <a:off x="640080" y="2985516"/>
+            <a:ext cx="10911535" cy="731520"/>
           </a:xfrm>
           <a:prstGeom prst="rect">
             <a:avLst/>
@@ -4261,83 +3806,13 @@
           <a:p>
             <a:pPr algn="ctr"/>
             <a:r>
-              <a:rPr sz="2200" b="0" i="1">
-                <a:solidFill>
-                  <a:srgbClr val="8C8C8C"/>
-                </a:solidFill>
-                <a:latin typeface="Arial"/>
-              </a:rPr>
-              <a:t/>
-            </a:r>
-          </a:p>
-        </p:txBody>
-      </p:sp>
-      <p:sp>
-        <p:nvSpPr>
-          <p:cNvPr id="4" name="TextBox 3"/>
-          <p:cNvSpPr txBox="1"/>
-          <p:nvPr/>
-        </p:nvSpPr>
-        <p:spPr>
-          <a:xfrm>
-            <a:off x="594360" y="3529584"/>
-            <a:ext cx="11002975" cy="685800"/>
-          </a:xfrm>
-          <a:prstGeom prst="rect">
-            <a:avLst/>
-          </a:prstGeom>
-          <a:noFill/>
-        </p:spPr>
-        <p:txBody>
-          <a:bodyPr wrap="square">
-            <a:spAutoFit/>
-          </a:bodyPr>
-          <a:lstStyle/>
-          <a:p>
-            <a:pPr algn="ctr"/>
-            <a:r>
-              <a:rPr sz="4400" b="1" i="0">
+              <a:rPr sz="4800" b="1" i="0">
                 <a:solidFill>
                   <a:srgbClr val="FFFFFF"/>
                 </a:solidFill>
                 <a:latin typeface="Arial"/>
               </a:rPr>
               <a:t>O Teu poder mostrando a criação.</a:t>
-            </a:r>
-          </a:p>
-        </p:txBody>
-      </p:sp>
-      <p:sp>
-        <p:nvSpPr>
-          <p:cNvPr id="5" name="TextBox 4"/>
-          <p:cNvSpPr txBox="1"/>
-          <p:nvPr/>
-        </p:nvSpPr>
-        <p:spPr>
-          <a:xfrm>
-            <a:off x="594360" y="4251960"/>
-            <a:ext cx="11002975" cy="347472"/>
-          </a:xfrm>
-          <a:prstGeom prst="rect">
-            <a:avLst/>
-          </a:prstGeom>
-          <a:noFill/>
-        </p:spPr>
-        <p:txBody>
-          <a:bodyPr wrap="square">
-            <a:spAutoFit/>
-          </a:bodyPr>
-          <a:lstStyle/>
-          <a:p>
-            <a:pPr algn="ctr"/>
-            <a:r>
-              <a:rPr sz="2200" b="0" i="1">
-                <a:solidFill>
-                  <a:srgbClr val="8C8C8C"/>
-                </a:solidFill>
-                <a:latin typeface="Arial"/>
-              </a:rPr>
-              <a:t/>
             </a:r>
           </a:p>
         </p:txBody>
@@ -4376,8 +3851,8 @@
         </p:nvSpPr>
         <p:spPr>
           <a:xfrm>
-            <a:off x="594360" y="2258568"/>
-            <a:ext cx="11002975" cy="685800"/>
+            <a:off x="640080" y="2052828"/>
+            <a:ext cx="10911535" cy="731520"/>
           </a:xfrm>
           <a:prstGeom prst="rect">
             <a:avLst/>
@@ -4392,7 +3867,7 @@
           <a:p>
             <a:pPr algn="ctr"/>
             <a:r>
-              <a:rPr sz="4141" b="1" i="0">
+              <a:rPr sz="4500" b="1" i="0">
                 <a:solidFill>
                   <a:srgbClr val="FFFFFF"/>
                 </a:solidFill>
@@ -4411,8 +3886,8 @@
         </p:nvSpPr>
         <p:spPr>
           <a:xfrm>
-            <a:off x="594360" y="2980944"/>
-            <a:ext cx="11002975" cy="347472"/>
+            <a:off x="640080" y="2985516"/>
+            <a:ext cx="10911535" cy="731520"/>
           </a:xfrm>
           <a:prstGeom prst="rect">
             <a:avLst/>
@@ -4427,13 +3902,13 @@
           <a:p>
             <a:pPr algn="ctr"/>
             <a:r>
-              <a:rPr sz="2200" b="0" i="1">
-                <a:solidFill>
-                  <a:srgbClr val="8C8C8C"/>
+              <a:rPr sz="4100" b="1" i="0">
+                <a:solidFill>
+                  <a:srgbClr val="FFFFFF"/>
                 </a:solidFill>
                 <a:latin typeface="Arial"/>
               </a:rPr>
-              <a:t>我が魂　  いざたたえよ　 大いなる御神を</a:t>
+              <a:t>Quão grande és Tu, quão grande és Tu.</a:t>
             </a:r>
           </a:p>
         </p:txBody>
@@ -4446,8 +3921,8 @@
         </p:nvSpPr>
         <p:spPr>
           <a:xfrm>
-            <a:off x="594360" y="3529584"/>
-            <a:ext cx="11002975" cy="685800"/>
+            <a:off x="640080" y="4128516"/>
+            <a:ext cx="10911535" cy="310896"/>
           </a:xfrm>
           <a:prstGeom prst="rect">
             <a:avLst/>
@@ -4462,13 +3937,13 @@
           <a:p>
             <a:pPr algn="ctr"/>
             <a:r>
-              <a:rPr sz="3805" b="1" i="0">
-                <a:solidFill>
-                  <a:srgbClr val="FFFFFF"/>
+              <a:rPr sz="2000" b="0" i="0">
+                <a:solidFill>
+                  <a:srgbClr val="828282"/>
                 </a:solidFill>
                 <a:latin typeface="Arial"/>
               </a:rPr>
-              <a:t>Quão grande és Tu, quão grande és Tu.</a:t>
+              <a:t>我が魂　  いざたたえよ　 大いなる御神を</a:t>
             </a:r>
           </a:p>
         </p:txBody>
@@ -4481,8 +3956,8 @@
         </p:nvSpPr>
         <p:spPr>
           <a:xfrm>
-            <a:off x="594360" y="4251960"/>
-            <a:ext cx="11002975" cy="347472"/>
+            <a:off x="640080" y="4494276"/>
+            <a:ext cx="10911535" cy="310896"/>
           </a:xfrm>
           <a:prstGeom prst="rect">
             <a:avLst/>
@@ -4497,9 +3972,9 @@
           <a:p>
             <a:pPr algn="ctr"/>
             <a:r>
-              <a:rPr sz="2200" b="0" i="1">
-                <a:solidFill>
-                  <a:srgbClr val="8C8C8C"/>
+              <a:rPr sz="2000" b="0" i="0">
+                <a:solidFill>
+                  <a:srgbClr val="828282"/>
                 </a:solidFill>
                 <a:latin typeface="Arial"/>
               </a:rPr>
@@ -4542,8 +4017,8 @@
         </p:nvSpPr>
         <p:spPr>
           <a:xfrm>
-            <a:off x="594360" y="2258568"/>
-            <a:ext cx="11002975" cy="685800"/>
+            <a:off x="640080" y="2052828"/>
+            <a:ext cx="10911535" cy="731520"/>
           </a:xfrm>
           <a:prstGeom prst="rect">
             <a:avLst/>
@@ -4558,7 +4033,7 @@
           <a:p>
             <a:pPr algn="ctr"/>
             <a:r>
-              <a:rPr sz="4141" b="1" i="0">
+              <a:rPr sz="4500" b="1" i="0">
                 <a:solidFill>
                   <a:srgbClr val="FFFFFF"/>
                 </a:solidFill>
@@ -4577,8 +4052,8 @@
         </p:nvSpPr>
         <p:spPr>
           <a:xfrm>
-            <a:off x="594360" y="2980944"/>
-            <a:ext cx="11002975" cy="347472"/>
+            <a:off x="640080" y="2985516"/>
+            <a:ext cx="10911535" cy="731520"/>
           </a:xfrm>
           <a:prstGeom prst="rect">
             <a:avLst/>
@@ -4593,83 +4068,13 @@
           <a:p>
             <a:pPr algn="ctr"/>
             <a:r>
-              <a:rPr sz="2200" b="0" i="1">
-                <a:solidFill>
-                  <a:srgbClr val="8C8C8C"/>
-                </a:solidFill>
-                <a:latin typeface="Arial"/>
-              </a:rPr>
-              <a:t/>
-            </a:r>
-          </a:p>
-        </p:txBody>
-      </p:sp>
-      <p:sp>
-        <p:nvSpPr>
-          <p:cNvPr id="4" name="TextBox 3"/>
-          <p:cNvSpPr txBox="1"/>
-          <p:nvPr/>
-        </p:nvSpPr>
-        <p:spPr>
-          <a:xfrm>
-            <a:off x="594360" y="3529584"/>
-            <a:ext cx="11002975" cy="685800"/>
-          </a:xfrm>
-          <a:prstGeom prst="rect">
-            <a:avLst/>
-          </a:prstGeom>
-          <a:noFill/>
-        </p:spPr>
-        <p:txBody>
-          <a:bodyPr wrap="square">
-            <a:spAutoFit/>
-          </a:bodyPr>
-          <a:lstStyle/>
-          <a:p>
-            <a:pPr algn="ctr"/>
-            <a:r>
-              <a:rPr sz="3805" b="1" i="0">
+              <a:rPr sz="4100" b="1" i="0">
                 <a:solidFill>
                   <a:srgbClr val="FFFFFF"/>
                 </a:solidFill>
                 <a:latin typeface="Arial"/>
               </a:rPr>
               <a:t>Quão grande és Tu, quão grande és Tu.</a:t>
-            </a:r>
-          </a:p>
-        </p:txBody>
-      </p:sp>
-      <p:sp>
-        <p:nvSpPr>
-          <p:cNvPr id="5" name="TextBox 4"/>
-          <p:cNvSpPr txBox="1"/>
-          <p:nvPr/>
-        </p:nvSpPr>
-        <p:spPr>
-          <a:xfrm>
-            <a:off x="594360" y="4251960"/>
-            <a:ext cx="11002975" cy="347472"/>
-          </a:xfrm>
-          <a:prstGeom prst="rect">
-            <a:avLst/>
-          </a:prstGeom>
-          <a:noFill/>
-        </p:spPr>
-        <p:txBody>
-          <a:bodyPr wrap="square">
-            <a:spAutoFit/>
-          </a:bodyPr>
-          <a:lstStyle/>
-          <a:p>
-            <a:pPr algn="ctr"/>
-            <a:r>
-              <a:rPr sz="2200" b="0" i="1">
-                <a:solidFill>
-                  <a:srgbClr val="8C8C8C"/>
-                </a:solidFill>
-                <a:latin typeface="Arial"/>
-              </a:rPr>
-              <a:t/>
             </a:r>
           </a:p>
         </p:txBody>
@@ -4708,8 +4113,8 @@
         </p:nvSpPr>
         <p:spPr>
           <a:xfrm>
-            <a:off x="594360" y="1837944"/>
-            <a:ext cx="11002975" cy="685800"/>
+            <a:off x="640080" y="1650492"/>
+            <a:ext cx="10911535" cy="731520"/>
           </a:xfrm>
           <a:prstGeom prst="rect">
             <a:avLst/>
@@ -4724,7 +4129,7 @@
           <a:p>
             <a:pPr algn="ctr"/>
             <a:r>
-              <a:rPr sz="4400" b="1" i="0">
+              <a:rPr sz="4800" b="1" i="0">
                 <a:solidFill>
                   <a:srgbClr val="FFFFFF"/>
                 </a:solidFill>
@@ -4743,8 +4148,8 @@
         </p:nvSpPr>
         <p:spPr>
           <a:xfrm>
-            <a:off x="594360" y="2560320"/>
-            <a:ext cx="11002975" cy="384048"/>
+            <a:off x="640080" y="2418588"/>
+            <a:ext cx="10911535" cy="365760"/>
           </a:xfrm>
           <a:prstGeom prst="rect">
             <a:avLst/>
@@ -4761,7 +4166,7 @@
             <a:r>
               <a:rPr sz="2400" b="0" i="1">
                 <a:solidFill>
-                  <a:srgbClr val="B4B4B4"/>
+                  <a:srgbClr val="AAAAAA"/>
                 </a:solidFill>
                 <a:latin typeface="Arial"/>
               </a:rPr>
@@ -4778,8 +4183,8 @@
         </p:nvSpPr>
         <p:spPr>
           <a:xfrm>
-            <a:off x="594360" y="2980944"/>
-            <a:ext cx="11002975" cy="347472"/>
+            <a:off x="640080" y="2985516"/>
+            <a:ext cx="10911535" cy="731520"/>
           </a:xfrm>
           <a:prstGeom prst="rect">
             <a:avLst/>
@@ -4794,13 +4199,13 @@
           <a:p>
             <a:pPr algn="ctr"/>
             <a:r>
-              <a:rPr sz="2000" b="0" i="1">
-                <a:solidFill>
-                  <a:srgbClr val="8C8C8C"/>
+              <a:rPr sz="4800" b="1" i="0">
+                <a:solidFill>
+                  <a:srgbClr val="FFFFFF"/>
                 </a:solidFill>
                 <a:latin typeface="Arial"/>
               </a:rPr>
-              <a:t/>
+              <a:t>そびゆる　   山に　登り</a:t>
             </a:r>
           </a:p>
         </p:txBody>
@@ -4813,8 +4218,8 @@
         </p:nvSpPr>
         <p:spPr>
           <a:xfrm>
-            <a:off x="594360" y="3529584"/>
-            <a:ext cx="11002975" cy="685800"/>
+            <a:off x="640080" y="3753612"/>
+            <a:ext cx="10911535" cy="365760"/>
           </a:xfrm>
           <a:prstGeom prst="rect">
             <a:avLst/>
@@ -4829,13 +4234,13 @@
           <a:p>
             <a:pPr algn="ctr"/>
             <a:r>
-              <a:rPr sz="4400" b="1" i="0">
-                <a:solidFill>
-                  <a:srgbClr val="FFFFFF"/>
+              <a:rPr sz="2400" b="0" i="1">
+                <a:solidFill>
+                  <a:srgbClr val="AAAAAA"/>
                 </a:solidFill>
                 <a:latin typeface="Arial"/>
               </a:rPr>
-              <a:t>そびゆる　   山に　登り</a:t>
+              <a:t>sobi yuru yama ni nobori</a:t>
             </a:r>
           </a:p>
         </p:txBody>
@@ -4848,8 +4253,8 @@
         </p:nvSpPr>
         <p:spPr>
           <a:xfrm>
-            <a:off x="594360" y="4251960"/>
-            <a:ext cx="11002975" cy="384048"/>
+            <a:off x="640080" y="4530852"/>
+            <a:ext cx="10911535" cy="310896"/>
           </a:xfrm>
           <a:prstGeom prst="rect">
             <a:avLst/>
@@ -4864,13 +4269,13 @@
           <a:p>
             <a:pPr algn="ctr"/>
             <a:r>
-              <a:rPr sz="2400" b="0" i="1">
-                <a:solidFill>
-                  <a:srgbClr val="B4B4B4"/>
+              <a:rPr sz="2000" b="0" i="1">
+                <a:solidFill>
+                  <a:srgbClr val="828282"/>
                 </a:solidFill>
                 <a:latin typeface="Arial"/>
               </a:rPr>
-              <a:t>sobi yuru yama ni nobori</a:t>
+              <a:t>Senhor, meu Deus, quando eu maravilhado</a:t>
             </a:r>
           </a:p>
         </p:txBody>
@@ -4883,8 +4288,8 @@
         </p:nvSpPr>
         <p:spPr>
           <a:xfrm>
-            <a:off x="594360" y="4672584"/>
-            <a:ext cx="11002975" cy="347472"/>
+            <a:off x="640080" y="4896612"/>
+            <a:ext cx="10911535" cy="310896"/>
           </a:xfrm>
           <a:prstGeom prst="rect">
             <a:avLst/>
@@ -4901,11 +4306,11 @@
             <a:r>
               <a:rPr sz="2000" b="0" i="1">
                 <a:solidFill>
-                  <a:srgbClr val="8C8C8C"/>
+                  <a:srgbClr val="828282"/>
                 </a:solidFill>
                 <a:latin typeface="Arial"/>
               </a:rPr>
-              <a:t/>
+              <a:t>Fico a pensar nas obras de Tuas mãos;</a:t>
             </a:r>
           </a:p>
         </p:txBody>
@@ -4944,8 +4349,8 @@
         </p:nvSpPr>
         <p:spPr>
           <a:xfrm>
-            <a:off x="594360" y="1837944"/>
-            <a:ext cx="11002975" cy="685800"/>
+            <a:off x="640080" y="1650492"/>
+            <a:ext cx="10911535" cy="731520"/>
           </a:xfrm>
           <a:prstGeom prst="rect">
             <a:avLst/>
@@ -4960,7 +4365,7 @@
           <a:p>
             <a:pPr algn="ctr"/>
             <a:r>
-              <a:rPr sz="4400" b="1" i="0">
+              <a:rPr sz="4800" b="1" i="0">
                 <a:solidFill>
                   <a:srgbClr val="FFFFFF"/>
                 </a:solidFill>
@@ -4979,8 +4384,8 @@
         </p:nvSpPr>
         <p:spPr>
           <a:xfrm>
-            <a:off x="594360" y="2560320"/>
-            <a:ext cx="11002975" cy="384048"/>
+            <a:off x="640080" y="2418588"/>
+            <a:ext cx="10911535" cy="365760"/>
           </a:xfrm>
           <a:prstGeom prst="rect">
             <a:avLst/>
@@ -4997,7 +4402,7 @@
             <a:r>
               <a:rPr sz="2400" b="0" i="1">
                 <a:solidFill>
-                  <a:srgbClr val="B4B4B4"/>
+                  <a:srgbClr val="AAAAAA"/>
                 </a:solidFill>
                 <a:latin typeface="Arial"/>
               </a:rPr>
@@ -5014,8 +4419,8 @@
         </p:nvSpPr>
         <p:spPr>
           <a:xfrm>
-            <a:off x="594360" y="2980944"/>
-            <a:ext cx="11002975" cy="347472"/>
+            <a:off x="640080" y="2985516"/>
+            <a:ext cx="10911535" cy="731520"/>
           </a:xfrm>
           <a:prstGeom prst="rect">
             <a:avLst/>
@@ -5030,13 +4435,13 @@
           <a:p>
             <a:pPr algn="ctr"/>
             <a:r>
-              <a:rPr sz="2000" b="0" i="1">
-                <a:solidFill>
-                  <a:srgbClr val="8C8C8C"/>
+              <a:rPr sz="4800" b="1" i="0">
+                <a:solidFill>
+                  <a:srgbClr val="FFFFFF"/>
                 </a:solidFill>
                 <a:latin typeface="Arial"/>
               </a:rPr>
-              <a:t/>
+              <a:t>まことの   　御神を思う (Stop)</a:t>
             </a:r>
           </a:p>
         </p:txBody>
@@ -5049,8 +4454,8 @@
         </p:nvSpPr>
         <p:spPr>
           <a:xfrm>
-            <a:off x="594360" y="3529584"/>
-            <a:ext cx="11002975" cy="685800"/>
+            <a:off x="640080" y="3753612"/>
+            <a:ext cx="10911535" cy="365760"/>
           </a:xfrm>
           <a:prstGeom prst="rect">
             <a:avLst/>
@@ -5065,13 +4470,13 @@
           <a:p>
             <a:pPr algn="ctr"/>
             <a:r>
-              <a:rPr sz="4400" b="1" i="0">
-                <a:solidFill>
-                  <a:srgbClr val="FFFFFF"/>
+              <a:rPr sz="2400" b="0" i="1">
+                <a:solidFill>
+                  <a:srgbClr val="AAAAAA"/>
                 </a:solidFill>
                 <a:latin typeface="Arial"/>
               </a:rPr>
-              <a:t>まことの   　御神を思う (Stop)</a:t>
+              <a:t>makoto no    mikami wo omou</a:t>
             </a:r>
           </a:p>
         </p:txBody>
@@ -5084,8 +4489,8 @@
         </p:nvSpPr>
         <p:spPr>
           <a:xfrm>
-            <a:off x="594360" y="4251960"/>
-            <a:ext cx="11002975" cy="384048"/>
+            <a:off x="640080" y="4530852"/>
+            <a:ext cx="10911535" cy="310896"/>
           </a:xfrm>
           <a:prstGeom prst="rect">
             <a:avLst/>
@@ -5100,13 +4505,13 @@
           <a:p>
             <a:pPr algn="ctr"/>
             <a:r>
-              <a:rPr sz="2400" b="0" i="1">
-                <a:solidFill>
-                  <a:srgbClr val="B4B4B4"/>
+              <a:rPr sz="2000" b="0" i="1">
+                <a:solidFill>
+                  <a:srgbClr val="828282"/>
                 </a:solidFill>
                 <a:latin typeface="Arial"/>
               </a:rPr>
-              <a:t>makoto no    mikami wo omou</a:t>
+              <a:t>No céu azul de estrelas pontilhado,</a:t>
             </a:r>
           </a:p>
         </p:txBody>
@@ -5119,8 +4524,8 @@
         </p:nvSpPr>
         <p:spPr>
           <a:xfrm>
-            <a:off x="594360" y="4672584"/>
-            <a:ext cx="11002975" cy="347472"/>
+            <a:off x="640080" y="4896612"/>
+            <a:ext cx="10911535" cy="310896"/>
           </a:xfrm>
           <a:prstGeom prst="rect">
             <a:avLst/>
@@ -5137,11 +4542,11 @@
             <a:r>
               <a:rPr sz="2000" b="0" i="1">
                 <a:solidFill>
-                  <a:srgbClr val="8C8C8C"/>
+                  <a:srgbClr val="828282"/>
                 </a:solidFill>
                 <a:latin typeface="Arial"/>
               </a:rPr>
-              <a:t/>
+              <a:t>O Teu poder mostrando a criação.</a:t>
             </a:r>
           </a:p>
         </p:txBody>
@@ -5180,8 +4585,8 @@
         </p:nvSpPr>
         <p:spPr>
           <a:xfrm>
-            <a:off x="594360" y="1837944"/>
-            <a:ext cx="11002975" cy="685800"/>
+            <a:off x="640080" y="1650492"/>
+            <a:ext cx="10911535" cy="731520"/>
           </a:xfrm>
           <a:prstGeom prst="rect">
             <a:avLst/>
@@ -5196,7 +4601,7 @@
           <a:p>
             <a:pPr algn="ctr"/>
             <a:r>
-              <a:rPr sz="4400" b="1" i="0">
+              <a:rPr sz="4800" b="1" i="0">
                 <a:solidFill>
                   <a:srgbClr val="FFFFFF"/>
                 </a:solidFill>
@@ -5215,8 +4620,8 @@
         </p:nvSpPr>
         <p:spPr>
           <a:xfrm>
-            <a:off x="594360" y="2560320"/>
-            <a:ext cx="11002975" cy="384048"/>
+            <a:off x="640080" y="2418588"/>
+            <a:ext cx="10911535" cy="365760"/>
           </a:xfrm>
           <a:prstGeom prst="rect">
             <a:avLst/>
@@ -5233,7 +4638,7 @@
             <a:r>
               <a:rPr sz="2400" b="0" i="1">
                 <a:solidFill>
-                  <a:srgbClr val="B4B4B4"/>
+                  <a:srgbClr val="AAAAAA"/>
                 </a:solidFill>
                 <a:latin typeface="Arial"/>
               </a:rPr>
@@ -5250,8 +4655,8 @@
         </p:nvSpPr>
         <p:spPr>
           <a:xfrm>
-            <a:off x="594360" y="2980944"/>
-            <a:ext cx="11002975" cy="347472"/>
+            <a:off x="640080" y="2985516"/>
+            <a:ext cx="10911535" cy="731520"/>
           </a:xfrm>
           <a:prstGeom prst="rect">
             <a:avLst/>
@@ -5266,13 +4671,13 @@
           <a:p>
             <a:pPr algn="ctr"/>
             <a:r>
-              <a:rPr sz="2000" b="0" i="1">
-                <a:solidFill>
-                  <a:srgbClr val="8C8C8C"/>
+              <a:rPr sz="4800" b="1" i="0">
+                <a:solidFill>
+                  <a:srgbClr val="FFFFFF"/>
                 </a:solidFill>
                 <a:latin typeface="Arial"/>
               </a:rPr>
-              <a:t/>
+              <a:t>一人の　    御子を　下し</a:t>
             </a:r>
           </a:p>
         </p:txBody>
@@ -5285,8 +4690,8 @@
         </p:nvSpPr>
         <p:spPr>
           <a:xfrm>
-            <a:off x="594360" y="3529584"/>
-            <a:ext cx="11002975" cy="685800"/>
+            <a:off x="640080" y="3753612"/>
+            <a:ext cx="10911535" cy="365760"/>
           </a:xfrm>
           <a:prstGeom prst="rect">
             <a:avLst/>
@@ -5301,83 +4706,13 @@
           <a:p>
             <a:pPr algn="ctr"/>
             <a:r>
-              <a:rPr sz="4400" b="1" i="0">
-                <a:solidFill>
-                  <a:srgbClr val="FFFFFF"/>
-                </a:solidFill>
-                <a:latin typeface="Arial"/>
-              </a:rPr>
-              <a:t>一人の　    御子を　下し</a:t>
-            </a:r>
-          </a:p>
-        </p:txBody>
-      </p:sp>
-      <p:sp>
-        <p:nvSpPr>
-          <p:cNvPr id="6" name="TextBox 5"/>
-          <p:cNvSpPr txBox="1"/>
-          <p:nvPr/>
-        </p:nvSpPr>
-        <p:spPr>
-          <a:xfrm>
-            <a:off x="594360" y="4251960"/>
-            <a:ext cx="11002975" cy="384048"/>
-          </a:xfrm>
-          <a:prstGeom prst="rect">
-            <a:avLst/>
-          </a:prstGeom>
-          <a:noFill/>
-        </p:spPr>
-        <p:txBody>
-          <a:bodyPr wrap="square">
-            <a:spAutoFit/>
-          </a:bodyPr>
-          <a:lstStyle/>
-          <a:p>
-            <a:pPr algn="ctr"/>
-            <a:r>
               <a:rPr sz="2400" b="0" i="1">
                 <a:solidFill>
-                  <a:srgbClr val="B4B4B4"/>
+                  <a:srgbClr val="AAAAAA"/>
                 </a:solidFill>
                 <a:latin typeface="Arial"/>
               </a:rPr>
               <a:t>hitori no  miko wo kudashi</a:t>
-            </a:r>
-          </a:p>
-        </p:txBody>
-      </p:sp>
-      <p:sp>
-        <p:nvSpPr>
-          <p:cNvPr id="7" name="TextBox 6"/>
-          <p:cNvSpPr txBox="1"/>
-          <p:nvPr/>
-        </p:nvSpPr>
-        <p:spPr>
-          <a:xfrm>
-            <a:off x="594360" y="4672584"/>
-            <a:ext cx="11002975" cy="347472"/>
-          </a:xfrm>
-          <a:prstGeom prst="rect">
-            <a:avLst/>
-          </a:prstGeom>
-          <a:noFill/>
-        </p:spPr>
-        <p:txBody>
-          <a:bodyPr wrap="square">
-            <a:spAutoFit/>
-          </a:bodyPr>
-          <a:lstStyle/>
-          <a:p>
-            <a:pPr algn="ctr"/>
-            <a:r>
-              <a:rPr sz="2000" b="0" i="1">
-                <a:solidFill>
-                  <a:srgbClr val="8C8C8C"/>
-                </a:solidFill>
-                <a:latin typeface="Arial"/>
-              </a:rPr>
-              <a:t/>
             </a:r>
           </a:p>
         </p:txBody>
@@ -5416,8 +4751,8 @@
         </p:nvSpPr>
         <p:spPr>
           <a:xfrm>
-            <a:off x="594360" y="1837944"/>
-            <a:ext cx="11002975" cy="685800"/>
+            <a:off x="640080" y="1650492"/>
+            <a:ext cx="10911535" cy="731520"/>
           </a:xfrm>
           <a:prstGeom prst="rect">
             <a:avLst/>
@@ -5432,7 +4767,7 @@
           <a:p>
             <a:pPr algn="ctr"/>
             <a:r>
-              <a:rPr sz="4400" b="1" i="0">
+              <a:rPr sz="4800" b="1" i="0">
                 <a:solidFill>
                   <a:srgbClr val="FFFFFF"/>
                 </a:solidFill>
@@ -5451,8 +4786,8 @@
         </p:nvSpPr>
         <p:spPr>
           <a:xfrm>
-            <a:off x="594360" y="2560320"/>
-            <a:ext cx="11002975" cy="384048"/>
+            <a:off x="640080" y="2418588"/>
+            <a:ext cx="10911535" cy="365760"/>
           </a:xfrm>
           <a:prstGeom prst="rect">
             <a:avLst/>
@@ -5469,7 +4804,7 @@
             <a:r>
               <a:rPr sz="2400" b="0" i="1">
                 <a:solidFill>
-                  <a:srgbClr val="B4B4B4"/>
+                  <a:srgbClr val="AAAAAA"/>
                 </a:solidFill>
                 <a:latin typeface="Arial"/>
               </a:rPr>
@@ -5486,8 +4821,8 @@
         </p:nvSpPr>
         <p:spPr>
           <a:xfrm>
-            <a:off x="594360" y="2980944"/>
-            <a:ext cx="11002975" cy="347472"/>
+            <a:off x="640080" y="2985516"/>
+            <a:ext cx="10911535" cy="731520"/>
           </a:xfrm>
           <a:prstGeom prst="rect">
             <a:avLst/>
@@ -5502,13 +4837,13 @@
           <a:p>
             <a:pPr algn="ctr"/>
             <a:r>
-              <a:rPr sz="2000" b="0" i="1">
-                <a:solidFill>
-                  <a:srgbClr val="8C8C8C"/>
+              <a:rPr sz="4800" b="1" i="0">
+                <a:solidFill>
+                  <a:srgbClr val="FFFFFF"/>
                 </a:solidFill>
                 <a:latin typeface="Arial"/>
               </a:rPr>
-              <a:t/>
+              <a:t>十字架に　    かけ給えり</a:t>
             </a:r>
           </a:p>
         </p:txBody>
@@ -5521,8 +4856,8 @@
         </p:nvSpPr>
         <p:spPr>
           <a:xfrm>
-            <a:off x="594360" y="3529584"/>
-            <a:ext cx="11002975" cy="685800"/>
+            <a:off x="640080" y="3753612"/>
+            <a:ext cx="10911535" cy="365760"/>
           </a:xfrm>
           <a:prstGeom prst="rect">
             <a:avLst/>
@@ -5537,83 +4872,13 @@
           <a:p>
             <a:pPr algn="ctr"/>
             <a:r>
-              <a:rPr sz="4400" b="1" i="0">
-                <a:solidFill>
-                  <a:srgbClr val="FFFFFF"/>
-                </a:solidFill>
-                <a:latin typeface="Arial"/>
-              </a:rPr>
-              <a:t>十字架に　    かけ給えり</a:t>
-            </a:r>
-          </a:p>
-        </p:txBody>
-      </p:sp>
-      <p:sp>
-        <p:nvSpPr>
-          <p:cNvPr id="6" name="TextBox 5"/>
-          <p:cNvSpPr txBox="1"/>
-          <p:nvPr/>
-        </p:nvSpPr>
-        <p:spPr>
-          <a:xfrm>
-            <a:off x="594360" y="4251960"/>
-            <a:ext cx="11002975" cy="384048"/>
-          </a:xfrm>
-          <a:prstGeom prst="rect">
-            <a:avLst/>
-          </a:prstGeom>
-          <a:noFill/>
-        </p:spPr>
-        <p:txBody>
-          <a:bodyPr wrap="square">
-            <a:spAutoFit/>
-          </a:bodyPr>
-          <a:lstStyle/>
-          <a:p>
-            <a:pPr algn="ctr"/>
-            <a:r>
               <a:rPr sz="2400" b="0" i="1">
                 <a:solidFill>
-                  <a:srgbClr val="B4B4B4"/>
+                  <a:srgbClr val="AAAAAA"/>
                 </a:solidFill>
                 <a:latin typeface="Arial"/>
               </a:rPr>
               <a:t>jyuujika ni kake tamaeri</a:t>
-            </a:r>
-          </a:p>
-        </p:txBody>
-      </p:sp>
-      <p:sp>
-        <p:nvSpPr>
-          <p:cNvPr id="7" name="TextBox 6"/>
-          <p:cNvSpPr txBox="1"/>
-          <p:nvPr/>
-        </p:nvSpPr>
-        <p:spPr>
-          <a:xfrm>
-            <a:off x="594360" y="4672584"/>
-            <a:ext cx="11002975" cy="347472"/>
-          </a:xfrm>
-          <a:prstGeom prst="rect">
-            <a:avLst/>
-          </a:prstGeom>
-          <a:noFill/>
-        </p:spPr>
-        <p:txBody>
-          <a:bodyPr wrap="square">
-            <a:spAutoFit/>
-          </a:bodyPr>
-          <a:lstStyle/>
-          <a:p>
-            <a:pPr algn="ctr"/>
-            <a:r>
-              <a:rPr sz="2000" b="0" i="1">
-                <a:solidFill>
-                  <a:srgbClr val="8C8C8C"/>
-                </a:solidFill>
-                <a:latin typeface="Arial"/>
-              </a:rPr>
-              <a:t/>
             </a:r>
           </a:p>
         </p:txBody>
@@ -5652,8 +4917,8 @@
         </p:nvSpPr>
         <p:spPr>
           <a:xfrm>
-            <a:off x="594360" y="1837944"/>
-            <a:ext cx="11002975" cy="685800"/>
+            <a:off x="640080" y="1650492"/>
+            <a:ext cx="10911535" cy="731520"/>
           </a:xfrm>
           <a:prstGeom prst="rect">
             <a:avLst/>
@@ -5668,7 +4933,7 @@
           <a:p>
             <a:pPr algn="ctr"/>
             <a:r>
-              <a:rPr sz="4400" b="1" i="0">
+              <a:rPr sz="4800" b="1" i="0">
                 <a:solidFill>
                   <a:srgbClr val="FFFFFF"/>
                 </a:solidFill>
@@ -5687,8 +4952,8 @@
         </p:nvSpPr>
         <p:spPr>
           <a:xfrm>
-            <a:off x="594360" y="2560320"/>
-            <a:ext cx="11002975" cy="384048"/>
+            <a:off x="640080" y="2418588"/>
+            <a:ext cx="10911535" cy="365760"/>
           </a:xfrm>
           <a:prstGeom prst="rect">
             <a:avLst/>
@@ -5703,9 +4968,9 @@
           <a:p>
             <a:pPr algn="ctr"/>
             <a:r>
-              <a:rPr sz="2344" b="0" i="1">
-                <a:solidFill>
-                  <a:srgbClr val="B4B4B4"/>
+              <a:rPr sz="2400" b="0" i="1">
+                <a:solidFill>
+                  <a:srgbClr val="AAAAAA"/>
                 </a:solidFill>
                 <a:latin typeface="Arial"/>
               </a:rPr>
@@ -5722,8 +4987,8 @@
         </p:nvSpPr>
         <p:spPr>
           <a:xfrm>
-            <a:off x="594360" y="2980944"/>
-            <a:ext cx="11002975" cy="347472"/>
+            <a:off x="640080" y="2985516"/>
+            <a:ext cx="10911535" cy="731520"/>
           </a:xfrm>
           <a:prstGeom prst="rect">
             <a:avLst/>
@@ -5738,13 +5003,13 @@
           <a:p>
             <a:pPr algn="ctr"/>
             <a:r>
-              <a:rPr sz="2000" b="0" i="1">
-                <a:solidFill>
-                  <a:srgbClr val="8C8C8C"/>
+              <a:rPr sz="4800" b="1" i="0">
+                <a:solidFill>
+                  <a:srgbClr val="FFFFFF"/>
                 </a:solidFill>
                 <a:latin typeface="Arial"/>
               </a:rPr>
-              <a:t>Então minh'alma canta a Ti Senhor:</a:t>
+              <a:t>我が魂　  いざたたえよ　 大いなる御神を</a:t>
             </a:r>
           </a:p>
         </p:txBody>
@@ -5757,8 +5022,8 @@
         </p:nvSpPr>
         <p:spPr>
           <a:xfrm>
-            <a:off x="594360" y="3529584"/>
-            <a:ext cx="11002975" cy="685800"/>
+            <a:off x="640080" y="3753612"/>
+            <a:ext cx="10911535" cy="365760"/>
           </a:xfrm>
           <a:prstGeom prst="rect">
             <a:avLst/>
@@ -5773,13 +5038,13 @@
           <a:p>
             <a:pPr algn="ctr"/>
             <a:r>
-              <a:rPr sz="4400" b="1" i="0">
-                <a:solidFill>
-                  <a:srgbClr val="FFFFFF"/>
+              <a:rPr sz="2400" b="0" i="1">
+                <a:solidFill>
+                  <a:srgbClr val="AAAAAA"/>
                 </a:solidFill>
                 <a:latin typeface="Arial"/>
               </a:rPr>
-              <a:t>我が魂　  いざたたえよ　 大いなる御神を</a:t>
+              <a:t>wa ga tama    iza tataeyo ooinaru mikami wo</a:t>
             </a:r>
           </a:p>
         </p:txBody>
@@ -5792,8 +5057,8 @@
         </p:nvSpPr>
         <p:spPr>
           <a:xfrm>
-            <a:off x="594360" y="4251960"/>
-            <a:ext cx="11002975" cy="384048"/>
+            <a:off x="640080" y="4530852"/>
+            <a:ext cx="10911535" cy="310896"/>
           </a:xfrm>
           <a:prstGeom prst="rect">
             <a:avLst/>
@@ -5808,13 +5073,13 @@
           <a:p>
             <a:pPr algn="ctr"/>
             <a:r>
-              <a:rPr sz="2344" b="0" i="1">
-                <a:solidFill>
-                  <a:srgbClr val="B4B4B4"/>
+              <a:rPr sz="2000" b="0" i="1">
+                <a:solidFill>
+                  <a:srgbClr val="828282"/>
                 </a:solidFill>
                 <a:latin typeface="Arial"/>
               </a:rPr>
-              <a:t>wa ga tama    iza tataeyo ooinaru mikami wo</a:t>
+              <a:t>Então minh'alma canta a Ti Senhor:</a:t>
             </a:r>
           </a:p>
         </p:txBody>
@@ -5827,8 +5092,8 @@
         </p:nvSpPr>
         <p:spPr>
           <a:xfrm>
-            <a:off x="594360" y="4672584"/>
-            <a:ext cx="11002975" cy="347472"/>
+            <a:off x="640080" y="4896612"/>
+            <a:ext cx="10911535" cy="310896"/>
           </a:xfrm>
           <a:prstGeom prst="rect">
             <a:avLst/>
@@ -5845,7 +5110,7 @@
             <a:r>
               <a:rPr sz="2000" b="0" i="1">
                 <a:solidFill>
-                  <a:srgbClr val="8C8C8C"/>
+                  <a:srgbClr val="828282"/>
                 </a:solidFill>
                 <a:latin typeface="Arial"/>
               </a:rPr>

--- a/output_pptx/How_Great_Thou_Art.pptx
+++ b/output_pptx/How_Great_Thou_Art.pptx
@@ -3180,6 +3180,76 @@
           </a:p>
         </p:txBody>
       </p:sp>
+      <p:sp>
+        <p:nvSpPr>
+          <p:cNvPr id="4" name="TextBox 3"/>
+          <p:cNvSpPr txBox="1"/>
+          <p:nvPr/>
+        </p:nvSpPr>
+        <p:spPr>
+          <a:xfrm>
+            <a:off x="640080" y="4128516"/>
+            <a:ext cx="10911535" cy="310896"/>
+          </a:xfrm>
+          <a:prstGeom prst="rect">
+            <a:avLst/>
+          </a:prstGeom>
+          <a:noFill/>
+        </p:spPr>
+        <p:txBody>
+          <a:bodyPr wrap="square">
+            <a:spAutoFit/>
+          </a:bodyPr>
+          <a:lstStyle/>
+          <a:p>
+            <a:pPr algn="ctr"/>
+            <a:r>
+              <a:rPr sz="2000" b="0" i="0">
+                <a:solidFill>
+                  <a:srgbClr val="828282"/>
+                </a:solidFill>
+                <a:latin typeface="Arial"/>
+              </a:rPr>
+              <a:t>主よ、わが神よ、私が驚嘆するとき</a:t>
+            </a:r>
+          </a:p>
+        </p:txBody>
+      </p:sp>
+      <p:sp>
+        <p:nvSpPr>
+          <p:cNvPr id="5" name="TextBox 4"/>
+          <p:cNvSpPr txBox="1"/>
+          <p:nvPr/>
+        </p:nvSpPr>
+        <p:spPr>
+          <a:xfrm>
+            <a:off x="640080" y="4494276"/>
+            <a:ext cx="10911535" cy="310896"/>
+          </a:xfrm>
+          <a:prstGeom prst="rect">
+            <a:avLst/>
+          </a:prstGeom>
+          <a:noFill/>
+        </p:spPr>
+        <p:txBody>
+          <a:bodyPr wrap="square">
+            <a:spAutoFit/>
+          </a:bodyPr>
+          <a:lstStyle/>
+          <a:p>
+            <a:pPr algn="ctr"/>
+            <a:r>
+              <a:rPr sz="2000" b="0" i="0">
+                <a:solidFill>
+                  <a:srgbClr val="828282"/>
+                </a:solidFill>
+                <a:latin typeface="Arial"/>
+              </a:rPr>
+              <a:t>あなたの手のわざを思い巡らします</a:t>
+            </a:r>
+          </a:p>
+        </p:txBody>
+      </p:sp>
     </p:spTree>
   </p:cSld>
   <p:clrMapOvr>
@@ -3276,6 +3346,76 @@
           </a:p>
         </p:txBody>
       </p:sp>
+      <p:sp>
+        <p:nvSpPr>
+          <p:cNvPr id="4" name="TextBox 3"/>
+          <p:cNvSpPr txBox="1"/>
+          <p:nvPr/>
+        </p:nvSpPr>
+        <p:spPr>
+          <a:xfrm>
+            <a:off x="640080" y="4128516"/>
+            <a:ext cx="10911535" cy="310896"/>
+          </a:xfrm>
+          <a:prstGeom prst="rect">
+            <a:avLst/>
+          </a:prstGeom>
+          <a:noFill/>
+        </p:spPr>
+        <p:txBody>
+          <a:bodyPr wrap="square">
+            <a:spAutoFit/>
+          </a:bodyPr>
+          <a:lstStyle/>
+          <a:p>
+            <a:pPr algn="ctr"/>
+            <a:r>
+              <a:rPr sz="2000" b="0" i="0">
+                <a:solidFill>
+                  <a:srgbClr val="828282"/>
+                </a:solidFill>
+                <a:latin typeface="Arial"/>
+              </a:rPr>
+              <a:t>喜びに満ちた鳥たちの歌を聞きます</a:t>
+            </a:r>
+          </a:p>
+        </p:txBody>
+      </p:sp>
+      <p:sp>
+        <p:nvSpPr>
+          <p:cNvPr id="5" name="TextBox 4"/>
+          <p:cNvSpPr txBox="1"/>
+          <p:nvPr/>
+        </p:nvSpPr>
+        <p:spPr>
+          <a:xfrm>
+            <a:off x="640080" y="4494276"/>
+            <a:ext cx="10911535" cy="310896"/>
+          </a:xfrm>
+          <a:prstGeom prst="rect">
+            <a:avLst/>
+          </a:prstGeom>
+          <a:noFill/>
+        </p:spPr>
+        <p:txBody>
+          <a:bodyPr wrap="square">
+            <a:spAutoFit/>
+          </a:bodyPr>
+          <a:lstStyle/>
+          <a:p>
+            <a:pPr algn="ctr"/>
+            <a:r>
+              <a:rPr sz="2000" b="0" i="0">
+                <a:solidFill>
+                  <a:srgbClr val="828282"/>
+                </a:solidFill>
+                <a:latin typeface="Arial"/>
+              </a:rPr>
+              <a:t>山々、谷間、そして平原を見つめながら</a:t>
+            </a:r>
+          </a:p>
+        </p:txBody>
+      </p:sp>
     </p:spTree>
   </p:cSld>
   <p:clrMapOvr>
@@ -3372,6 +3512,76 @@
           </a:p>
         </p:txBody>
       </p:sp>
+      <p:sp>
+        <p:nvSpPr>
+          <p:cNvPr id="4" name="TextBox 3"/>
+          <p:cNvSpPr txBox="1"/>
+          <p:nvPr/>
+        </p:nvSpPr>
+        <p:spPr>
+          <a:xfrm>
+            <a:off x="640080" y="4128516"/>
+            <a:ext cx="10911535" cy="310896"/>
+          </a:xfrm>
+          <a:prstGeom prst="rect">
+            <a:avLst/>
+          </a:prstGeom>
+          <a:noFill/>
+        </p:spPr>
+        <p:txBody>
+          <a:bodyPr wrap="square">
+            <a:spAutoFit/>
+          </a:bodyPr>
+          <a:lstStyle/>
+          <a:p>
+            <a:pPr algn="ctr"/>
+            <a:r>
+              <a:rPr sz="2000" b="0" i="0">
+                <a:solidFill>
+                  <a:srgbClr val="828282"/>
+                </a:solidFill>
+                <a:latin typeface="Arial"/>
+              </a:rPr>
+              <a:t>すべてのものであなたの比類なき力を見ます</a:t>
+            </a:r>
+          </a:p>
+        </p:txBody>
+      </p:sp>
+      <p:sp>
+        <p:nvSpPr>
+          <p:cNvPr id="5" name="TextBox 4"/>
+          <p:cNvSpPr txBox="1"/>
+          <p:nvPr/>
+        </p:nvSpPr>
+        <p:spPr>
+          <a:xfrm>
+            <a:off x="640080" y="4494276"/>
+            <a:ext cx="10911535" cy="310896"/>
+          </a:xfrm>
+          <a:prstGeom prst="rect">
+            <a:avLst/>
+          </a:prstGeom>
+          <a:noFill/>
+        </p:spPr>
+        <p:txBody>
+          <a:bodyPr wrap="square">
+            <a:spAutoFit/>
+          </a:bodyPr>
+          <a:lstStyle/>
+          <a:p>
+            <a:pPr algn="ctr"/>
+            <a:r>
+              <a:rPr sz="2000" b="0" i="0">
+                <a:solidFill>
+                  <a:srgbClr val="828282"/>
+                </a:solidFill>
+                <a:latin typeface="Arial"/>
+              </a:rPr>
+              <a:t>そのとき私の魂があなたに歌います</a:t>
+            </a:r>
+          </a:p>
+        </p:txBody>
+      </p:sp>
     </p:spTree>
   </p:cSld>
   <p:clrMapOvr>
@@ -3468,6 +3678,76 @@
           </a:p>
         </p:txBody>
       </p:sp>
+      <p:sp>
+        <p:nvSpPr>
+          <p:cNvPr id="4" name="TextBox 3"/>
+          <p:cNvSpPr txBox="1"/>
+          <p:nvPr/>
+        </p:nvSpPr>
+        <p:spPr>
+          <a:xfrm>
+            <a:off x="640080" y="4128516"/>
+            <a:ext cx="10911535" cy="310896"/>
+          </a:xfrm>
+          <a:prstGeom prst="rect">
+            <a:avLst/>
+          </a:prstGeom>
+          <a:noFill/>
+        </p:spPr>
+        <p:txBody>
+          <a:bodyPr wrap="square">
+            <a:spAutoFit/>
+          </a:bodyPr>
+          <a:lstStyle/>
+          <a:p>
+            <a:pPr algn="ctr"/>
+            <a:r>
+              <a:rPr sz="2000" b="0" i="0">
+                <a:solidFill>
+                  <a:srgbClr val="828282"/>
+                </a:solidFill>
+                <a:latin typeface="Arial"/>
+              </a:rPr>
+              <a:t>あなたは何と偉大でしょう、何と偉大でしょう</a:t>
+            </a:r>
+          </a:p>
+        </p:txBody>
+      </p:sp>
+      <p:sp>
+        <p:nvSpPr>
+          <p:cNvPr id="5" name="TextBox 4"/>
+          <p:cNvSpPr txBox="1"/>
+          <p:nvPr/>
+        </p:nvSpPr>
+        <p:spPr>
+          <a:xfrm>
+            <a:off x="640080" y="4494276"/>
+            <a:ext cx="10911535" cy="310896"/>
+          </a:xfrm>
+          <a:prstGeom prst="rect">
+            <a:avLst/>
+          </a:prstGeom>
+          <a:noFill/>
+        </p:spPr>
+        <p:txBody>
+          <a:bodyPr wrap="square">
+            <a:spAutoFit/>
+          </a:bodyPr>
+          <a:lstStyle/>
+          <a:p>
+            <a:pPr algn="ctr"/>
+            <a:r>
+              <a:rPr sz="2000" b="0" i="0">
+                <a:solidFill>
+                  <a:srgbClr val="828282"/>
+                </a:solidFill>
+                <a:latin typeface="Arial"/>
+              </a:rPr>
+              <a:t>そのとき私の魂があなたに歌います</a:t>
+            </a:r>
+          </a:p>
+        </p:txBody>
+      </p:sp>
     </p:spTree>
   </p:cSld>
   <p:clrMapOvr>
@@ -3529,6 +3809,41 @@
           </a:p>
         </p:txBody>
       </p:sp>
+      <p:sp>
+        <p:nvSpPr>
+          <p:cNvPr id="3" name="TextBox 2"/>
+          <p:cNvSpPr txBox="1"/>
+          <p:nvPr/>
+        </p:nvSpPr>
+        <p:spPr>
+          <a:xfrm>
+            <a:off x="640080" y="3845052"/>
+            <a:ext cx="10911535" cy="310896"/>
+          </a:xfrm>
+          <a:prstGeom prst="rect">
+            <a:avLst/>
+          </a:prstGeom>
+          <a:noFill/>
+        </p:spPr>
+        <p:txBody>
+          <a:bodyPr wrap="square">
+            <a:spAutoFit/>
+          </a:bodyPr>
+          <a:lstStyle/>
+          <a:p>
+            <a:pPr algn="ctr"/>
+            <a:r>
+              <a:rPr sz="2000" b="0" i="0">
+                <a:solidFill>
+                  <a:srgbClr val="828282"/>
+                </a:solidFill>
+                <a:latin typeface="Arial"/>
+              </a:rPr>
+              <a:t>あなたは何と偉大でしょう、何と偉大でしょう</a:t>
+            </a:r>
+          </a:p>
+        </p:txBody>
+      </p:sp>
     </p:spTree>
   </p:cSld>
   <p:clrMapOvr>
@@ -3625,6 +3940,76 @@
           </a:p>
         </p:txBody>
       </p:sp>
+      <p:sp>
+        <p:nvSpPr>
+          <p:cNvPr id="4" name="TextBox 3"/>
+          <p:cNvSpPr txBox="1"/>
+          <p:nvPr/>
+        </p:nvSpPr>
+        <p:spPr>
+          <a:xfrm>
+            <a:off x="640080" y="4128516"/>
+            <a:ext cx="10911535" cy="310896"/>
+          </a:xfrm>
+          <a:prstGeom prst="rect">
+            <a:avLst/>
+          </a:prstGeom>
+          <a:noFill/>
+        </p:spPr>
+        <p:txBody>
+          <a:bodyPr wrap="square">
+            <a:spAutoFit/>
+          </a:bodyPr>
+          <a:lstStyle/>
+          <a:p>
+            <a:pPr algn="ctr"/>
+            <a:r>
+              <a:rPr sz="2000" b="0" i="0">
+                <a:solidFill>
+                  <a:srgbClr val="828282"/>
+                </a:solidFill>
+                <a:latin typeface="Arial"/>
+              </a:rPr>
+              <a:t>あなたの大いなる愛について瞑想するとき</a:t>
+            </a:r>
+          </a:p>
+        </p:txBody>
+      </p:sp>
+      <p:sp>
+        <p:nvSpPr>
+          <p:cNvPr id="5" name="TextBox 4"/>
+          <p:cNvSpPr txBox="1"/>
+          <p:nvPr/>
+        </p:nvSpPr>
+        <p:spPr>
+          <a:xfrm>
+            <a:off x="640080" y="4494276"/>
+            <a:ext cx="10911535" cy="310896"/>
+          </a:xfrm>
+          <a:prstGeom prst="rect">
+            <a:avLst/>
+          </a:prstGeom>
+          <a:noFill/>
+        </p:spPr>
+        <p:txBody>
+          <a:bodyPr wrap="square">
+            <a:spAutoFit/>
+          </a:bodyPr>
+          <a:lstStyle/>
+          <a:p>
+            <a:pPr algn="ctr"/>
+            <a:r>
+              <a:rPr sz="2000" b="0" i="0">
+                <a:solidFill>
+                  <a:srgbClr val="828282"/>
+                </a:solidFill>
+                <a:latin typeface="Arial"/>
+              </a:rPr>
+              <a:t>あなたの子を世に与えて救うために</a:t>
+            </a:r>
+          </a:p>
+        </p:txBody>
+      </p:sp>
     </p:spTree>
   </p:cSld>
   <p:clrMapOvr>
@@ -3721,6 +4106,76 @@
           </a:p>
         </p:txBody>
       </p:sp>
+      <p:sp>
+        <p:nvSpPr>
+          <p:cNvPr id="4" name="TextBox 3"/>
+          <p:cNvSpPr txBox="1"/>
+          <p:nvPr/>
+        </p:nvSpPr>
+        <p:spPr>
+          <a:xfrm>
+            <a:off x="640080" y="4128516"/>
+            <a:ext cx="10911535" cy="310896"/>
+          </a:xfrm>
+          <a:prstGeom prst="rect">
+            <a:avLst/>
+          </a:prstGeom>
+          <a:noFill/>
+        </p:spPr>
+        <p:txBody>
+          <a:bodyPr wrap="square">
+            <a:spAutoFit/>
+          </a:bodyPr>
+          <a:lstStyle/>
+          <a:p>
+            <a:pPr algn="ctr"/>
+            <a:r>
+              <a:rPr sz="2000" b="0" i="0">
+                <a:solidFill>
+                  <a:srgbClr val="828282"/>
+                </a:solidFill>
+                <a:latin typeface="Arial"/>
+              </a:rPr>
+              <a:t>十字架で尊い血を流されました</a:t>
+            </a:r>
+          </a:p>
+        </p:txBody>
+      </p:sp>
+      <p:sp>
+        <p:nvSpPr>
+          <p:cNvPr id="5" name="TextBox 4"/>
+          <p:cNvSpPr txBox="1"/>
+          <p:nvPr/>
+        </p:nvSpPr>
+        <p:spPr>
+          <a:xfrm>
+            <a:off x="640080" y="4494276"/>
+            <a:ext cx="10911535" cy="310896"/>
+          </a:xfrm>
+          <a:prstGeom prst="rect">
+            <a:avLst/>
+          </a:prstGeom>
+          <a:noFill/>
+        </p:spPr>
+        <p:txBody>
+          <a:bodyPr wrap="square">
+            <a:spAutoFit/>
+          </a:bodyPr>
+          <a:lstStyle/>
+          <a:p>
+            <a:pPr algn="ctr"/>
+            <a:r>
+              <a:rPr sz="2000" b="0" i="0">
+                <a:solidFill>
+                  <a:srgbClr val="828282"/>
+                </a:solidFill>
+                <a:latin typeface="Arial"/>
+              </a:rPr>
+              <a:t>私の魂はこのように清められることができました</a:t>
+            </a:r>
+          </a:p>
+        </p:txBody>
+      </p:sp>
     </p:spTree>
   </p:cSld>
   <p:clrMapOvr>
@@ -3817,6 +4272,76 @@
           </a:p>
         </p:txBody>
       </p:sp>
+      <p:sp>
+        <p:nvSpPr>
+          <p:cNvPr id="4" name="TextBox 3"/>
+          <p:cNvSpPr txBox="1"/>
+          <p:nvPr/>
+        </p:nvSpPr>
+        <p:spPr>
+          <a:xfrm>
+            <a:off x="640080" y="4128516"/>
+            <a:ext cx="10911535" cy="310896"/>
+          </a:xfrm>
+          <a:prstGeom prst="rect">
+            <a:avLst/>
+          </a:prstGeom>
+          <a:noFill/>
+        </p:spPr>
+        <p:txBody>
+          <a:bodyPr wrap="square">
+            <a:spAutoFit/>
+          </a:bodyPr>
+          <a:lstStyle/>
+          <a:p>
+            <a:pPr algn="ctr"/>
+            <a:r>
+              <a:rPr sz="2000" b="0" i="0">
+                <a:solidFill>
+                  <a:srgbClr val="828282"/>
+                </a:solidFill>
+                <a:latin typeface="Arial"/>
+              </a:rPr>
+              <a:t>星で点在する青い天において</a:t>
+            </a:r>
+          </a:p>
+        </p:txBody>
+      </p:sp>
+      <p:sp>
+        <p:nvSpPr>
+          <p:cNvPr id="5" name="TextBox 4"/>
+          <p:cNvSpPr txBox="1"/>
+          <p:nvPr/>
+        </p:nvSpPr>
+        <p:spPr>
+          <a:xfrm>
+            <a:off x="640080" y="4494276"/>
+            <a:ext cx="10911535" cy="310896"/>
+          </a:xfrm>
+          <a:prstGeom prst="rect">
+            <a:avLst/>
+          </a:prstGeom>
+          <a:noFill/>
+        </p:spPr>
+        <p:txBody>
+          <a:bodyPr wrap="square">
+            <a:spAutoFit/>
+          </a:bodyPr>
+          <a:lstStyle/>
+          <a:p>
+            <a:pPr algn="ctr"/>
+            <a:r>
+              <a:rPr sz="2000" b="0" i="0">
+                <a:solidFill>
+                  <a:srgbClr val="828282"/>
+                </a:solidFill>
+                <a:latin typeface="Arial"/>
+              </a:rPr>
+              <a:t>あなたの力が創造を示しています</a:t>
+            </a:r>
+          </a:p>
+        </p:txBody>
+      </p:sp>
     </p:spTree>
   </p:cSld>
   <p:clrMapOvr>
@@ -4079,6 +4604,76 @@
           </a:p>
         </p:txBody>
       </p:sp>
+      <p:sp>
+        <p:nvSpPr>
+          <p:cNvPr id="4" name="TextBox 3"/>
+          <p:cNvSpPr txBox="1"/>
+          <p:nvPr/>
+        </p:nvSpPr>
+        <p:spPr>
+          <a:xfrm>
+            <a:off x="640080" y="4128516"/>
+            <a:ext cx="10911535" cy="310896"/>
+          </a:xfrm>
+          <a:prstGeom prst="rect">
+            <a:avLst/>
+          </a:prstGeom>
+          <a:noFill/>
+        </p:spPr>
+        <p:txBody>
+          <a:bodyPr wrap="square">
+            <a:spAutoFit/>
+          </a:bodyPr>
+          <a:lstStyle/>
+          <a:p>
+            <a:pPr algn="ctr"/>
+            <a:r>
+              <a:rPr sz="2000" b="0" i="0">
+                <a:solidFill>
+                  <a:srgbClr val="828282"/>
+                </a:solidFill>
+                <a:latin typeface="Arial"/>
+              </a:rPr>
+              <a:t>そのとき私の魂があなたに歌います</a:t>
+            </a:r>
+          </a:p>
+        </p:txBody>
+      </p:sp>
+      <p:sp>
+        <p:nvSpPr>
+          <p:cNvPr id="5" name="TextBox 4"/>
+          <p:cNvSpPr txBox="1"/>
+          <p:nvPr/>
+        </p:nvSpPr>
+        <p:spPr>
+          <a:xfrm>
+            <a:off x="640080" y="4494276"/>
+            <a:ext cx="10911535" cy="310896"/>
+          </a:xfrm>
+          <a:prstGeom prst="rect">
+            <a:avLst/>
+          </a:prstGeom>
+          <a:noFill/>
+        </p:spPr>
+        <p:txBody>
+          <a:bodyPr wrap="square">
+            <a:spAutoFit/>
+          </a:bodyPr>
+          <a:lstStyle/>
+          <a:p>
+            <a:pPr algn="ctr"/>
+            <a:r>
+              <a:rPr sz="2000" b="0" i="0">
+                <a:solidFill>
+                  <a:srgbClr val="828282"/>
+                </a:solidFill>
+                <a:latin typeface="Arial"/>
+              </a:rPr>
+              <a:t>あなたは何と偉大でしょう、何と偉大でしょう</a:t>
+            </a:r>
+          </a:p>
+        </p:txBody>
+      </p:sp>
     </p:spTree>
   </p:cSld>
   <p:clrMapOvr>
@@ -4717,6 +5312,76 @@
           </a:p>
         </p:txBody>
       </p:sp>
+      <p:sp>
+        <p:nvSpPr>
+          <p:cNvPr id="6" name="TextBox 5"/>
+          <p:cNvSpPr txBox="1"/>
+          <p:nvPr/>
+        </p:nvSpPr>
+        <p:spPr>
+          <a:xfrm>
+            <a:off x="640080" y="4530852"/>
+            <a:ext cx="10911535" cy="310896"/>
+          </a:xfrm>
+          <a:prstGeom prst="rect">
+            <a:avLst/>
+          </a:prstGeom>
+          <a:noFill/>
+        </p:spPr>
+        <p:txBody>
+          <a:bodyPr wrap="square">
+            <a:spAutoFit/>
+          </a:bodyPr>
+          <a:lstStyle/>
+          <a:p>
+            <a:pPr algn="ctr"/>
+            <a:r>
+              <a:rPr sz="2000" b="0" i="1">
+                <a:solidFill>
+                  <a:srgbClr val="828282"/>
+                </a:solidFill>
+                <a:latin typeface="Arial"/>
+              </a:rPr>
+              <a:t>Deus amou o mundo</a:t>
+            </a:r>
+          </a:p>
+        </p:txBody>
+      </p:sp>
+      <p:sp>
+        <p:nvSpPr>
+          <p:cNvPr id="7" name="TextBox 6"/>
+          <p:cNvSpPr txBox="1"/>
+          <p:nvPr/>
+        </p:nvSpPr>
+        <p:spPr>
+          <a:xfrm>
+            <a:off x="640080" y="4896612"/>
+            <a:ext cx="10911535" cy="310896"/>
+          </a:xfrm>
+          <a:prstGeom prst="rect">
+            <a:avLst/>
+          </a:prstGeom>
+          <a:noFill/>
+        </p:spPr>
+        <p:txBody>
+          <a:bodyPr wrap="square">
+            <a:spAutoFit/>
+          </a:bodyPr>
+          <a:lstStyle/>
+          <a:p>
+            <a:pPr algn="ctr"/>
+            <a:r>
+              <a:rPr sz="2000" b="0" i="1">
+                <a:solidFill>
+                  <a:srgbClr val="828282"/>
+                </a:solidFill>
+                <a:latin typeface="Arial"/>
+              </a:rPr>
+              <a:t>E enviou seu único Filho</a:t>
+            </a:r>
+          </a:p>
+        </p:txBody>
+      </p:sp>
     </p:spTree>
   </p:cSld>
   <p:clrMapOvr>
@@ -4879,6 +5544,76 @@
                 <a:latin typeface="Arial"/>
               </a:rPr>
               <a:t>jyuujika ni kake tamaeri</a:t>
+            </a:r>
+          </a:p>
+        </p:txBody>
+      </p:sp>
+      <p:sp>
+        <p:nvSpPr>
+          <p:cNvPr id="6" name="TextBox 5"/>
+          <p:cNvSpPr txBox="1"/>
+          <p:nvPr/>
+        </p:nvSpPr>
+        <p:spPr>
+          <a:xfrm>
+            <a:off x="640080" y="4530852"/>
+            <a:ext cx="10911535" cy="310896"/>
+          </a:xfrm>
+          <a:prstGeom prst="rect">
+            <a:avLst/>
+          </a:prstGeom>
+          <a:noFill/>
+        </p:spPr>
+        <p:txBody>
+          <a:bodyPr wrap="square">
+            <a:spAutoFit/>
+          </a:bodyPr>
+          <a:lstStyle/>
+          <a:p>
+            <a:pPr algn="ctr"/>
+            <a:r>
+              <a:rPr sz="2000" b="0" i="1">
+                <a:solidFill>
+                  <a:srgbClr val="828282"/>
+                </a:solidFill>
+                <a:latin typeface="Arial"/>
+              </a:rPr>
+              <a:t>Para a salvação do mundo</a:t>
+            </a:r>
+          </a:p>
+        </p:txBody>
+      </p:sp>
+      <p:sp>
+        <p:nvSpPr>
+          <p:cNvPr id="7" name="TextBox 6"/>
+          <p:cNvSpPr txBox="1"/>
+          <p:nvPr/>
+        </p:nvSpPr>
+        <p:spPr>
+          <a:xfrm>
+            <a:off x="640080" y="4896612"/>
+            <a:ext cx="10911535" cy="310896"/>
+          </a:xfrm>
+          <a:prstGeom prst="rect">
+            <a:avLst/>
+          </a:prstGeom>
+          <a:noFill/>
+        </p:spPr>
+        <p:txBody>
+          <a:bodyPr wrap="square">
+            <a:spAutoFit/>
+          </a:bodyPr>
+          <a:lstStyle/>
+          <a:p>
+            <a:pPr algn="ctr"/>
+            <a:r>
+              <a:rPr sz="2000" b="0" i="1">
+                <a:solidFill>
+                  <a:srgbClr val="828282"/>
+                </a:solidFill>
+                <a:latin typeface="Arial"/>
+              </a:rPr>
+              <a:t>E o colocou na cruz</a:t>
             </a:r>
           </a:p>
         </p:txBody>
